--- a/slides/webapp-security-programming-handson-2026-en.pptx
+++ b/slides/webapp-security-programming-handson-2026-en.pptx
@@ -10606,7 +10606,7 @@
                 <a:ea typeface="Aptos Display" pitchFamily="34" charset="-122"/>
                 <a:cs typeface="Aptos Display" pitchFamily="34" charset="-120"/>
               </a:rPr>
-              <a:t>Exercise 1: Try Bottle</a:t>
+              <a:t>Basic Exercise 2: Try Bottle</a:t>
             </a:r>
             <a:endParaRPr lang="en-US" sz="2600" dirty="0"/>
           </a:p>
@@ -13495,7 +13495,7 @@
                 <a:ea typeface="Aptos Display" pitchFamily="34" charset="-122"/>
                 <a:cs typeface="Aptos Display" pitchFamily="34" charset="-120"/>
               </a:rPr>
-              <a:t>Exercise 1: Original Bottle Code</a:t>
+              <a:t>Basic Exercise 2: Original Bottle Code</a:t>
             </a:r>
             <a:endParaRPr lang="en-US" sz="2600" dirty="0"/>
           </a:p>
@@ -13979,7 +13979,7 @@
                 <a:ea typeface="Aptos Display" pitchFamily="34" charset="-122"/>
                 <a:cs typeface="Aptos Display" pitchFamily="34" charset="-120"/>
               </a:rPr>
-              <a:t>Exercise 1: Run the App</a:t>
+              <a:t>Basic Exercise 2: Run the App</a:t>
             </a:r>
             <a:endParaRPr lang="en-US" sz="2600" dirty="0"/>
           </a:p>
@@ -14451,7 +14451,7 @@
                 <a:ea typeface="Aptos Display" pitchFamily="34" charset="-122"/>
                 <a:cs typeface="Aptos Display" pitchFamily="34" charset="-120"/>
               </a:rPr>
-              <a:t>Exercise 1: Bottle Walkthrough</a:t>
+              <a:t>Basic Exercise 2: Bottle Walkthrough</a:t>
             </a:r>
             <a:endParaRPr lang="en-US" sz="2600" dirty="0"/>
           </a:p>
@@ -14867,7 +14867,7 @@
                 <a:ea typeface="Aptos Display" pitchFamily="34" charset="-122"/>
                 <a:cs typeface="Aptos Display" pitchFamily="34" charset="-120"/>
               </a:rPr>
-              <a:t>Ex 1: Try Bottle</a:t>
+              <a:t>Basic Exercise 2: Try Bottle</a:t>
             </a:r>
             <a:endParaRPr lang="en-US" sz="2600" dirty="0"/>
           </a:p>
@@ -15260,7 +15260,7 @@
                 <a:ea typeface="Aptos Display" pitchFamily="34" charset="-122"/>
                 <a:cs typeface="Aptos Display" pitchFamily="34" charset="-120"/>
               </a:rPr>
-              <a:t>Exercise 2: Try Peewee and SQLite</a:t>
+              <a:t>Basic Exercise 3: Try Peewee and SQLite</a:t>
             </a:r>
             <a:endParaRPr lang="en-US" sz="2600" dirty="0"/>
           </a:p>
@@ -15664,7 +15664,7 @@
                 <a:ea typeface="Aptos Display" pitchFamily="34" charset="-122"/>
                 <a:cs typeface="Aptos Display" pitchFamily="34" charset="-120"/>
               </a:rPr>
-              <a:t>Exercise 2: Original Peewee Code</a:t>
+              <a:t>Basic Exercise 3: Original Peewee Code</a:t>
             </a:r>
             <a:endParaRPr lang="en-US" sz="2600" dirty="0"/>
           </a:p>
@@ -16256,7 +16256,7 @@
                 <a:ea typeface="Aptos Display" pitchFamily="34" charset="-122"/>
                 <a:cs typeface="Aptos Display" pitchFamily="34" charset="-120"/>
               </a:rPr>
-              <a:t>Exercise 2: Inspect SQLite</a:t>
+              <a:t>Basic Exercise 3: Inspect SQLite</a:t>
             </a:r>
             <a:endParaRPr lang="en-US" sz="2600" dirty="0"/>
           </a:p>
@@ -16745,7 +16745,7 @@
                 <a:ea typeface="Aptos Display" pitchFamily="34" charset="-122"/>
                 <a:cs typeface="Aptos Display" pitchFamily="34" charset="-120"/>
               </a:rPr>
-              <a:t>Exercise 2: Database Operations</a:t>
+              <a:t>Basic Exercise 3: Database Operations</a:t>
             </a:r>
             <a:endParaRPr lang="en-US" sz="2600" dirty="0"/>
           </a:p>
@@ -17132,7 +17132,7 @@
                 <a:ea typeface="Aptos Display" pitchFamily="34" charset="-122"/>
                 <a:cs typeface="Aptos Display" pitchFamily="34" charset="-120"/>
               </a:rPr>
-              <a:t>Exercise 2: Database Checkpoints</a:t>
+              <a:t>Basic Exercise 3: Database Checkpoints</a:t>
             </a:r>
             <a:endParaRPr lang="en-US" sz="2600" dirty="0"/>
           </a:p>
@@ -17895,7 +17895,7 @@
                 <a:ea typeface="Aptos Display" pitchFamily="34" charset="-122"/>
                 <a:cs typeface="Aptos Display" pitchFamily="34" charset="-120"/>
               </a:rPr>
-              <a:t>Exercise 2: Insert Data with Peewee</a:t>
+              <a:t>Basic Exercise 3: Insert Data with Peewee</a:t>
             </a:r>
             <a:endParaRPr lang="en-US" sz="2600" dirty="0"/>
           </a:p>
@@ -18328,7 +18328,7 @@
                 <a:ea typeface="Aptos Display" pitchFamily="34" charset="-122"/>
                 <a:cs typeface="Aptos Display" pitchFamily="34" charset="-120"/>
               </a:rPr>
-              <a:t>Ex 2: Try Peewee and SQLite</a:t>
+              <a:t>Basic Exercise 3: Try Peewee and SQLite</a:t>
             </a:r>
             <a:endParaRPr lang="en-US" sz="2600" dirty="0"/>
           </a:p>
@@ -18755,7 +18755,7 @@
                 <a:ea typeface="Aptos Display" pitchFamily="34" charset="-122"/>
                 <a:cs typeface="Aptos Display" pitchFamily="34" charset="-120"/>
               </a:rPr>
-              <a:t>Ex 2: Direct Database Access</a:t>
+              <a:t>Basic Exercise 3: Direct Database Access</a:t>
             </a:r>
             <a:endParaRPr lang="en-US" sz="2600" dirty="0"/>
           </a:p>
@@ -19165,7 +19165,7 @@
                 <a:ea typeface="Aptos Display" pitchFamily="34" charset="-122"/>
                 <a:cs typeface="Aptos Display" pitchFamily="34" charset="-120"/>
               </a:rPr>
-              <a:t>Exercise 2: Direct Database Checkpoints</a:t>
+              <a:t>Basic Exercise 3: Direct Database Checkpoints</a:t>
             </a:r>
             <a:endParaRPr lang="en-US" sz="2600" dirty="0"/>
           </a:p>
@@ -30031,7 +30031,7 @@
                 <a:ea typeface="Aptos Display" pitchFamily="34" charset="-122"/>
                 <a:cs typeface="Aptos Display" pitchFamily="34" charset="-120"/>
               </a:rPr>
-              <a:t>Exercise 3: Session Hijacking</a:t>
+              <a:t>Basic Exercise 4: Session Hijacking</a:t>
             </a:r>
             <a:endParaRPr lang="en-US" sz="2600" dirty="0"/>
           </a:p>
@@ -31290,7 +31290,7 @@
                 <a:ea typeface="Aptos Display" pitchFamily="34" charset="-122"/>
                 <a:cs typeface="Aptos Display" pitchFamily="34" charset="-120"/>
               </a:rPr>
-              <a:t>Exercise 3 Advanced: Compare Signed Cookies</a:t>
+              <a:t>Advanced Exercise 5: Compare Signed Cookies</a:t>
             </a:r>
             <a:endParaRPr lang="en-US" sz="2600" dirty="0"/>
           </a:p>
@@ -37577,7 +37577,7 @@
                 <a:ea typeface="Aptos Display" pitchFamily="34" charset="-122"/>
                 <a:cs typeface="Aptos Display" pitchFamily="34" charset="-120"/>
               </a:rPr>
-              <a:t>Exercise 4: XSS</a:t>
+              <a:t>Basic Exercise 6: XSS</a:t>
             </a:r>
             <a:endParaRPr lang="en-US" sz="2600" dirty="0"/>
           </a:p>
@@ -38039,7 +38039,7 @@
                 <a:ea typeface="Aptos Display" pitchFamily="34" charset="-122"/>
                 <a:cs typeface="Aptos Display" pitchFamily="34" charset="-120"/>
               </a:rPr>
-              <a:t>Exercise 4 Advanced: Explain XSS</a:t>
+              <a:t>Advanced Exercise 7: Explain XSS</a:t>
             </a:r>
             <a:endParaRPr lang="en-US" sz="2600" dirty="0"/>
           </a:p>
@@ -41341,7 +41341,7 @@
                 <a:ea typeface="Aptos Display" pitchFamily="34" charset="-122"/>
                 <a:cs typeface="Aptos Display" pitchFamily="34" charset="-120"/>
               </a:rPr>
-              <a:t>Exercise 5: CSRF</a:t>
+              <a:t>Basic Exercise 8: CSRF</a:t>
             </a:r>
             <a:endParaRPr lang="en-US" sz="2600" dirty="0"/>
           </a:p>
@@ -43472,7 +43472,7 @@
                 <a:ea typeface="Aptos Display" pitchFamily="34" charset="-122"/>
                 <a:cs typeface="Aptos Display" pitchFamily="34" charset="-120"/>
               </a:rPr>
-              <a:t>Exercise 6: SQL Injection</a:t>
+              <a:t>Basic Exercise 9: SQL Injection</a:t>
             </a:r>
             <a:endParaRPr lang="en-US" sz="2600" dirty="0"/>
           </a:p>
@@ -48917,7 +48917,7 @@
                 <a:ea typeface="Aptos Display" pitchFamily="34" charset="-122"/>
                 <a:cs typeface="Aptos Display" pitchFamily="34" charset="-120"/>
               </a:rPr>
-              <a:t>Exercise 7: Command Injection</a:t>
+              <a:t>Basic Exercise 10: Command Injection</a:t>
             </a:r>
             <a:endParaRPr lang="en-US" sz="2600" dirty="0"/>
           </a:p>
@@ -53384,7 +53384,7 @@
                 <a:ea typeface="Aptos Display" pitchFamily="34" charset="-122"/>
                 <a:cs typeface="Aptos Display" pitchFamily="34" charset="-120"/>
               </a:rPr>
-              <a:t>Exercise 8: Improve the UI with Pico.css</a:t>
+              <a:t>Basic Exercise 11: Improve the UI with Pico.css</a:t>
             </a:r>
             <a:endParaRPr lang="en-US" sz="2600" dirty="0"/>
           </a:p>
@@ -53533,7 +53533,7 @@
                 <a:ea typeface="Aptos" pitchFamily="34" charset="-122"/>
                 <a:cs typeface="Aptos" pitchFamily="34" charset="-120"/>
               </a:rPr>
-              <a:t>6. In Exercise 9, implement vulnerability mitigations one by one</a:t>
+              <a:t>6. In Advanced Exercises 12-18, implement vulnerability mitigations one by one</a:t>
             </a:r>
             <a:endParaRPr lang="en-US" sz="1480" dirty="0"/>
           </a:p>
@@ -53794,7 +53794,7 @@
                 <a:ea typeface="Aptos Display" pitchFamily="34" charset="-122"/>
                 <a:cs typeface="Aptos Display" pitchFamily="34" charset="-120"/>
               </a:rPr>
-              <a:t>Exercise 9: Fix Tasks</a:t>
+              <a:t>Advanced Exercises 12-18: Fix Tasks</a:t>
             </a:r>
             <a:endParaRPr lang="en-US" sz="2600" dirty="0"/>
           </a:p>
